--- a/AI_Agent_Semiconductor_Yield_Report.pptx
+++ b/AI_Agent_Semiconductor_Yield_Report.pptx
@@ -3148,8 +3148,8 @@
         </p:nvSpPr>
         <p:spPr>
           <a:xfrm>
-            <a:off x="914400" y="1371600"/>
-            <a:ext cx="10362895" cy="4114800"/>
+            <a:off x="731520" y="1371600"/>
+            <a:ext cx="5486400" cy="4114800"/>
           </a:xfrm>
           <a:prstGeom prst="rect">
             <a:avLst/>
@@ -3187,24 +3187,112 @@
       </p:sp>
       <p:sp>
         <p:nvSpPr>
-          <p:cNvPr id="4" name="Rectangle 3"/>
+          <p:cNvPr id="4" name="TextBox 3"/>
+          <p:cNvSpPr txBox="1"/>
+          <p:nvPr/>
+        </p:nvSpPr>
+        <p:spPr>
+          <a:xfrm>
+            <a:off x="1097280" y="1645920"/>
+            <a:ext cx="4754880" cy="2011680"/>
+          </a:xfrm>
+          <a:prstGeom prst="rect">
+            <a:avLst/>
+          </a:prstGeom>
+          <a:noFill/>
+        </p:spPr>
+        <p:txBody>
+          <a:bodyPr wrap="square" lIns="0" rIns="0" tIns="0" bIns="0">
+            <a:spAutoFit/>
+          </a:bodyPr>
+          <a:lstStyle/>
+          <a:p>
+            <a:pPr>
+              <a:spcAft>
+                <a:spcPts val="1400"/>
+              </a:spcAft>
+              <a:defRPr sz="2800" b="1">
+                <a:solidFill>
+                  <a:srgbClr val="F8FAFC"/>
+                </a:solidFill>
+                <a:latin typeface="Microsoft JhengHei"/>
+              </a:defRPr>
+            </a:pPr>
+            <a:r>
+              <a:t>AI Agent驅動半導體良率躍升：智慧製造新紀元</a:t>
+            </a:r>
+          </a:p>
+          <a:p>
+            <a:pPr>
+              <a:defRPr sz="1400" b="1">
+                <a:solidFill>
+                  <a:srgbClr val="38BDF8"/>
+                </a:solidFill>
+                <a:latin typeface="Microsoft JhengHei"/>
+              </a:defRPr>
+            </a:pPr>
+            <a:r>
+              <a:t>全球最新趨勢與良率深度解析：從智能分析到自主行動</a:t>
+            </a:r>
+          </a:p>
+        </p:txBody>
+      </p:sp>
+      <p:sp>
+        <p:nvSpPr>
+          <p:cNvPr id="5" name="TextBox 4"/>
+          <p:cNvSpPr txBox="1"/>
+          <p:nvPr/>
+        </p:nvSpPr>
+        <p:spPr>
+          <a:xfrm>
+            <a:off x="1097280" y="4297680"/>
+            <a:ext cx="4754880" cy="914400"/>
+          </a:xfrm>
+          <a:prstGeom prst="rect">
+            <a:avLst/>
+          </a:prstGeom>
+          <a:noFill/>
+        </p:spPr>
+        <p:txBody>
+          <a:bodyPr wrap="square" lIns="0" rIns="0" tIns="0" bIns="0">
+            <a:spAutoFit/>
+          </a:bodyPr>
+          <a:lstStyle/>
+          <a:p>
+            <a:pPr>
+              <a:defRPr sz="1200">
+                <a:solidFill>
+                  <a:srgbClr val="94A3B8"/>
+                </a:solidFill>
+                <a:latin typeface="Segoe UI"/>
+              </a:defRPr>
+            </a:pPr>
+            <a:r>
+              <a:t>AI 研究小組 | 2026-05-30</a:t>
+            </a:r>
+          </a:p>
+        </p:txBody>
+      </p:sp>
+      <p:sp>
+        <p:nvSpPr>
+          <p:cNvPr id="6" name="Rectangle 5"/>
           <p:cNvSpPr/>
           <p:nvPr/>
         </p:nvSpPr>
         <p:spPr>
           <a:xfrm>
-            <a:off x="1371600" y="3566160"/>
-            <a:ext cx="4114800" cy="36576"/>
+            <a:off x="6583680" y="1371600"/>
+            <a:ext cx="4876495" cy="4114800"/>
           </a:xfrm>
           <a:prstGeom prst="rect">
             <a:avLst/>
           </a:prstGeom>
           <a:solidFill>
-            <a:srgbClr val="FDE047"/>
+            <a:srgbClr val="1E293B"/>
           </a:solidFill>
-          <a:ln>
+          <a:ln w="19050">
             <a:solidFill>
-              <a:srgbClr val="FDE047"/>
+              <a:srgbClr val="334155"/>
             </a:solidFill>
           </a:ln>
         </p:spPr>
@@ -3230,94 +3318,30 @@
           </a:p>
         </p:txBody>
       </p:sp>
-      <p:sp>
-        <p:nvSpPr>
-          <p:cNvPr id="5" name="TextBox 4"/>
-          <p:cNvSpPr txBox="1"/>
+      <p:pic>
+        <p:nvPicPr>
+          <p:cNvPr id="7" name="Picture 6" descr="semiconductor_ai.png"/>
+          <p:cNvPicPr>
+            <a:picLocks noChangeAspect="1"/>
+          </p:cNvPicPr>
           <p:nvPr/>
-        </p:nvSpPr>
-        <p:spPr>
-          <a:xfrm>
-            <a:off x="1371600" y="1645920"/>
-            <a:ext cx="9448495" cy="1828800"/>
+        </p:nvPicPr>
+        <p:blipFill>
+          <a:blip r:embed="rId2"/>
+          <a:stretch>
+            <a:fillRect/>
+          </a:stretch>
+        </p:blipFill>
+        <p:spPr>
+          <a:xfrm>
+            <a:off x="6720840" y="1508760"/>
+            <a:ext cx="4602175" cy="3840480"/>
           </a:xfrm>
           <a:prstGeom prst="rect">
             <a:avLst/>
           </a:prstGeom>
-          <a:noFill/>
-        </p:spPr>
-        <p:txBody>
-          <a:bodyPr wrap="square" lIns="0" rIns="0" tIns="0" bIns="0">
-            <a:spAutoFit/>
-          </a:bodyPr>
-          <a:lstStyle/>
-          <a:p>
-            <a:pPr>
-              <a:spcAft>
-                <a:spcPts val="2400"/>
-              </a:spcAft>
-              <a:defRPr sz="3600" b="1">
-                <a:solidFill>
-                  <a:srgbClr val="F8FAFC"/>
-                </a:solidFill>
-                <a:latin typeface="Microsoft JhengHei"/>
-              </a:defRPr>
-            </a:pPr>
-            <a:r>
-              <a:t>AI Agent 驅動半導體良率革新：智慧製程與未來展望</a:t>
-            </a:r>
-          </a:p>
-          <a:p>
-            <a:pPr>
-              <a:defRPr sz="1800" b="1">
-                <a:solidFill>
-                  <a:srgbClr val="38BDF8"/>
-                </a:solidFill>
-                <a:latin typeface="Microsoft JhengHei"/>
-              </a:defRPr>
-            </a:pPr>
-            <a:r>
-              <a:t>洞察全球最新趨勢與良率深度解析</a:t>
-            </a:r>
-          </a:p>
-        </p:txBody>
-      </p:sp>
-      <p:sp>
-        <p:nvSpPr>
-          <p:cNvPr id="6" name="TextBox 5"/>
-          <p:cNvSpPr txBox="1"/>
-          <p:nvPr/>
-        </p:nvSpPr>
-        <p:spPr>
-          <a:xfrm>
-            <a:off x="1371600" y="4114800"/>
-            <a:ext cx="9448495" cy="914400"/>
-          </a:xfrm>
-          <a:prstGeom prst="rect">
-            <a:avLst/>
-          </a:prstGeom>
-          <a:noFill/>
-        </p:spPr>
-        <p:txBody>
-          <a:bodyPr wrap="square" lIns="0" rIns="0" tIns="0" bIns="0">
-            <a:spAutoFit/>
-          </a:bodyPr>
-          <a:lstStyle/>
-          <a:p>
-            <a:pPr>
-              <a:defRPr sz="1300">
-                <a:solidFill>
-                  <a:srgbClr val="94A3B8"/>
-                </a:solidFill>
-                <a:latin typeface="Segoe UI"/>
-              </a:defRPr>
-            </a:pPr>
-            <a:r>
-              <a:t>AI 研究小組 | 2024-07-30</a:t>
-            </a:r>
-          </a:p>
-        </p:txBody>
-      </p:sp>
+        </p:spPr>
+      </p:pic>
     </p:spTree>
   </p:cSld>
   <p:clrMapOvr>
@@ -3415,7 +3439,7 @@
               </a:defRPr>
             </a:pPr>
             <a:r>
-              <a:t>AI Agent 賦能半導體製造：良率提升新範式</a:t>
+              <a:t>AI Agent：半導體良率突破的關鍵驅動力</a:t>
             </a:r>
           </a:p>
           <a:p>
@@ -3428,7 +3452,7 @@
               </a:defRPr>
             </a:pPr>
             <a:r>
-              <a:t>從數據分析到自主決策，引領製程智慧化轉型</a:t>
+              <a:t>從被動響應到主動預防，重塑製造未來</a:t>
             </a:r>
           </a:p>
         </p:txBody>
@@ -3512,7 +3536,7 @@
               </a:defRPr>
             </a:pPr>
             <a:r>
-              <a:t>📍 製程複雜度與良率挑戰</a:t>
+              <a:t>📍 AI Agent：良率提升核心</a:t>
             </a:r>
           </a:p>
           <a:p>
@@ -3528,7 +3552,7 @@
               </a:defRPr>
             </a:pPr>
             <a:r>
-              <a:t>隨著半導體技術邁入亞奈米時代，製程複雜度呈指數級增長，傳統控制方法難以應對高維度、非線性數據。良率控制成為產業競爭核心，AI Agent 具備自主學習、推理與行動能力，為解決此瓶頸帶來革命性潛力。</a:t>
+              <a:t>AI Agent正將半導體製造從傳統的被動響應轉變為主動預防與自我優化。它們能克服傳統SPC靜態閾值的限制，透過即時數據流分析，捕捉緩慢的參數漂移或複雜交互作用，避免良率驟降。這項技術的導入，預計能將製程異常檢測效率提升20-30%，並減少5-8%的潛在良率損失，為產業帶來數億美元的價值。</a:t>
             </a:r>
           </a:p>
         </p:txBody>
@@ -3612,7 +3636,7 @@
               </a:defRPr>
             </a:pPr>
             <a:r>
-              <a:t>📍 AI Agent 角色演進與潛力</a:t>
+              <a:t>📍 自主化趨勢與產業展望</a:t>
             </a:r>
           </a:p>
           <a:p>
@@ -3628,7 +3652,7 @@
               </a:defRPr>
             </a:pPr>
             <a:r>
-              <a:t>AI Agent 正從被動數據分析工具，轉變為具備決策能力的智能實體。其能實時監控數百個製程變量，預測微小偏差，並執行主動調整。預計可將良率提升 1.7% 以上，誤報率降低 40%，MTTD 縮短 30%。</a:t>
+              <a:t>Intel預計到2025年，AI Agent將實現5-8%的自主化，並在2028年自主做出15%的半導體製造與設計決策。這顯示AI Agent已從智能分析邁向自主行動。設備供應商TEL也預計，AI將推動半導體設備市場在2026年實現兩位數增長，預示著設備將更深度整合AI功能，以支持未來智慧製造的需求。</a:t>
             </a:r>
           </a:p>
         </p:txBody>
@@ -3730,7 +3754,7 @@
               </a:defRPr>
             </a:pPr>
             <a:r>
-              <a:t>智慧製程控制：AI Agent 實現預測性與精準化</a:t>
+              <a:t>自主製程控制：即時校準與預測性維護</a:t>
             </a:r>
           </a:p>
           <a:p>
@@ -3743,7 +3767,7 @@
               </a:defRPr>
             </a:pPr>
             <a:r>
-              <a:t>告別反應式管理，邁向主動預防與實時優化</a:t>
+              <a:t>數位神經系統，實現閉環自愈</a:t>
             </a:r>
           </a:p>
         </p:txBody>
@@ -3757,7 +3781,7 @@
         <p:spPr>
           <a:xfrm>
             <a:off x="914400" y="1645920"/>
-            <a:ext cx="3200400" cy="4389120"/>
+            <a:ext cx="4846320" cy="2057400"/>
           </a:xfrm>
           <a:prstGeom prst="rect">
             <a:avLst/>
@@ -3801,8 +3825,8 @@
         </p:nvSpPr>
         <p:spPr>
           <a:xfrm>
-            <a:off x="1234440" y="1965960"/>
-            <a:ext cx="2560320" cy="3749040"/>
+            <a:off x="1143000" y="1874520"/>
+            <a:ext cx="4389120" cy="1600200"/>
           </a:xfrm>
           <a:prstGeom prst="rect">
             <a:avLst/>
@@ -3817,9 +3841,9 @@
           <a:p>
             <a:pPr>
               <a:spcAft>
-                <a:spcPts val="1400"/>
+                <a:spcPts val="800"/>
               </a:spcAft>
-              <a:defRPr sz="1600" b="1">
+              <a:defRPr sz="1500" b="1">
                 <a:solidFill>
                   <a:srgbClr val="FDE047"/>
                 </a:solidFill>
@@ -3827,15 +3851,15 @@
               </a:defRPr>
             </a:pPr>
             <a:r>
-              <a:t>📍 AI 增強型 SPC/APC 系統</a:t>
+              <a:t>📍 即時數據流分析與預測性維護</a:t>
             </a:r>
           </a:p>
           <a:p>
             <a:pPr>
               <a:lnSpc>
-                <a:spcPct val="135000"/>
+                <a:spcPct val="130000"/>
               </a:lnSpc>
-              <a:defRPr sz="1200">
+              <a:defRPr sz="1100">
                 <a:solidFill>
                   <a:srgbClr val="CBD5E1"/>
                 </a:solidFill>
@@ -3843,7 +3867,7 @@
               </a:defRPr>
             </a:pPr>
             <a:r>
-              <a:t>傳統 SPC/APC 面臨高維數據限制，AI 系統利用 LSTM、Autoencoders、Random Forest 等算法，同時監控數百個製程變量，精準識別微小異常。實現從被動應對轉為主動預防，確保嚴格質量標準。</a:t>
+              <a:t>AI Agent 7x24小時連續掃描FDC、Metrology、MES等系統的即時數據流，不僅關注參數越界，更關注設備老化或環境波動導致的緩慢漂移。例如，TSMC的光刻Agent能檢測疊對精度漂移，並自主協調量測Agent即時重新校準工具，有效防止報廢晶圓，潛在節省數億美元的良率損失，將停機時間減少15-20%。</a:t>
             </a:r>
           </a:p>
         </p:txBody>
@@ -3856,8 +3880,8 @@
         </p:nvSpPr>
         <p:spPr>
           <a:xfrm>
-            <a:off x="4495190" y="1645920"/>
-            <a:ext cx="3200400" cy="4389120"/>
+            <a:off x="914400" y="3977640"/>
+            <a:ext cx="4846320" cy="2057400"/>
           </a:xfrm>
           <a:prstGeom prst="rect">
             <a:avLst/>
@@ -3901,8 +3925,8 @@
         </p:nvSpPr>
         <p:spPr>
           <a:xfrm>
-            <a:off x="4815230" y="1965960"/>
-            <a:ext cx="2560320" cy="3749040"/>
+            <a:off x="1143000" y="4206240"/>
+            <a:ext cx="4389120" cy="1600200"/>
           </a:xfrm>
           <a:prstGeom prst="rect">
             <a:avLst/>
@@ -3917,9 +3941,9 @@
           <a:p>
             <a:pPr>
               <a:spcAft>
-                <a:spcPts val="1400"/>
+                <a:spcPts val="800"/>
               </a:spcAft>
-              <a:defRPr sz="1600" b="1">
+              <a:defRPr sz="1500" b="1">
                 <a:solidFill>
                   <a:srgbClr val="FDE047"/>
                 </a:solidFill>
@@ -3927,15 +3951,15 @@
               </a:defRPr>
             </a:pPr>
             <a:r>
-              <a:t>📍 實時漂移預測與虛擬計量</a:t>
+              <a:t>📍 虛擬量測與閉環自愈系統</a:t>
             </a:r>
           </a:p>
           <a:p>
             <a:pPr>
               <a:lnSpc>
-                <a:spcPct val="135000"/>
+                <a:spcPct val="130000"/>
               </a:lnSpc>
-              <a:defRPr sz="1200">
+              <a:defRPr sz="1100">
                 <a:solidFill>
                   <a:srgbClr val="CBD5E1"/>
                 </a:solidFill>
@@ -3943,7 +3967,7 @@
               </a:defRPr>
             </a:pPr>
             <a:r>
-              <a:t>AI 系統能在數秒內預測製程漂移並執行實時調整，相較傳統數小時的延遲大幅縮短。透過深度學習模型構建虛擬計量，在實際加工前估計關鍵指標，提升決策效率，縮短產品上市時間。</a:t>
+              <a:t>AI Agent利用虛擬量測(VM)技術，在不中斷產線的情況下即時預測關鍵品質參數，可減少50-70%的實體量測需求，大幅提升產能利用率。這使得晶圓廠能更快獲得品質反饋並進行即時調整。AI Agent正構建晶圓廠的「數位神經系統」，實現從「事後警報」到「事中干預」的閉環自愈，數據被智能體主動抓取、關聯與推理。</a:t>
             </a:r>
           </a:p>
         </p:txBody>
@@ -3956,8 +3980,8 @@
         </p:nvSpPr>
         <p:spPr>
           <a:xfrm>
-            <a:off x="8075980" y="1645920"/>
-            <a:ext cx="3200400" cy="4389120"/>
+            <a:off x="6217920" y="1645920"/>
+            <a:ext cx="5029200" cy="4389120"/>
           </a:xfrm>
           <a:prstGeom prst="rect">
             <a:avLst/>
@@ -3993,61 +4017,30 @@
           </a:p>
         </p:txBody>
       </p:sp>
-      <p:sp>
-        <p:nvSpPr>
-          <p:cNvPr id="9" name="TextBox 8"/>
-          <p:cNvSpPr txBox="1"/>
+      <p:pic>
+        <p:nvPicPr>
+          <p:cNvPr id="9" name="Picture 8" descr="chamber_control.png"/>
+          <p:cNvPicPr>
+            <a:picLocks noChangeAspect="1"/>
+          </p:cNvPicPr>
           <p:nvPr/>
-        </p:nvSpPr>
-        <p:spPr>
-          <a:xfrm>
-            <a:off x="8396020" y="1965960"/>
-            <a:ext cx="2560320" cy="3749040"/>
+        </p:nvPicPr>
+        <p:blipFill>
+          <a:blip r:embed="rId2"/>
+          <a:stretch>
+            <a:fillRect/>
+          </a:stretch>
+        </p:blipFill>
+        <p:spPr>
+          <a:xfrm>
+            <a:off x="6355080" y="1783080"/>
+            <a:ext cx="4754880" cy="4114800"/>
           </a:xfrm>
           <a:prstGeom prst="rect">
             <a:avLst/>
           </a:prstGeom>
-          <a:noFill/>
-        </p:spPr>
-        <p:txBody>
-          <a:bodyPr wrap="square" lIns="0" rIns="0" tIns="0" bIns="0">
-            <a:spAutoFit/>
-          </a:bodyPr>
-          <a:lstStyle/>
-          <a:p>
-            <a:pPr>
-              <a:spcAft>
-                <a:spcPts val="1400"/>
-              </a:spcAft>
-              <a:defRPr sz="1600" b="1">
-                <a:solidFill>
-                  <a:srgbClr val="FDE047"/>
-                </a:solidFill>
-                <a:latin typeface="Microsoft JhengHei"/>
-              </a:defRPr>
-            </a:pPr>
-            <a:r>
-              <a:t>📍 Agentic AI 系統的轉變</a:t>
-            </a:r>
-          </a:p>
-          <a:p>
-            <a:pPr>
-              <a:lnSpc>
-                <a:spcPct val="135000"/>
-              </a:lnSpc>
-              <a:defRPr sz="1200">
-                <a:solidFill>
-                  <a:srgbClr val="CBD5E1"/>
-                </a:solidFill>
-                <a:latin typeface="Microsoft JhengHei"/>
-              </a:defRPr>
-            </a:pPr>
-            <a:r>
-              <a:t>半導體製造正從傳統 R2R 系統轉向 Agentic AI，這些系統能理解領域知識，從每次結果中學習改進。Intel 智能工廠動態調整參數，Averroes AI 提供實時漂移管理，Oxmaint 平台已將良率提升 18%。</a:t>
-            </a:r>
-          </a:p>
-        </p:txBody>
-      </p:sp>
+        </p:spPr>
+      </p:pic>
     </p:spTree>
   </p:cSld>
   <p:clrMapOvr>
@@ -4145,7 +4138,7 @@
               </a:defRPr>
             </a:pPr>
             <a:r>
-              <a:t>缺陷偵測革命：AI Agent 實現精準識別與快速診斷</a:t>
+              <a:t>智能缺陷分析：加速根因診斷與解決</a:t>
             </a:r>
           </a:p>
           <a:p>
@@ -4158,7 +4151,7 @@
               </a:defRPr>
             </a:pPr>
             <a:r>
-              <a:t>從視覺檢測到語義理解，加速良率提升週期</a:t>
+              <a:t>多模態數據融合，精準識別微觀缺陷</a:t>
             </a:r>
           </a:p>
         </p:txBody>
@@ -4172,7 +4165,7 @@
         <p:spPr>
           <a:xfrm>
             <a:off x="914400" y="1645920"/>
-            <a:ext cx="3200400" cy="4389120"/>
+            <a:ext cx="4846320" cy="2057400"/>
           </a:xfrm>
           <a:prstGeom prst="rect">
             <a:avLst/>
@@ -4216,8 +4209,8 @@
         </p:nvSpPr>
         <p:spPr>
           <a:xfrm>
-            <a:off x="1234440" y="1965960"/>
-            <a:ext cx="2560320" cy="3749040"/>
+            <a:off x="1143000" y="1874520"/>
+            <a:ext cx="4389120" cy="1600200"/>
           </a:xfrm>
           <a:prstGeom prst="rect">
             <a:avLst/>
@@ -4232,9 +4225,9 @@
           <a:p>
             <a:pPr>
               <a:spcAft>
-                <a:spcPts val="1400"/>
+                <a:spcPts val="800"/>
               </a:spcAft>
-              <a:defRPr sz="1600" b="1">
+              <a:defRPr sz="1500" b="1">
                 <a:solidFill>
                   <a:srgbClr val="FDE047"/>
                 </a:solidFill>
@@ -4242,15 +4235,15 @@
               </a:defRPr>
             </a:pPr>
             <a:r>
-              <a:t>📍 AI 驅動的視覺檢測與生成式 AI</a:t>
+              <a:t>📍 AI驅動的缺陷檢測與分類</a:t>
             </a:r>
           </a:p>
           <a:p>
             <a:pPr>
               <a:lnSpc>
-                <a:spcPct val="135000"/>
+                <a:spcPct val="130000"/>
               </a:lnSpc>
-              <a:defRPr sz="1200">
+              <a:defRPr sz="1100">
                 <a:solidFill>
                   <a:srgbClr val="CBD5E1"/>
                 </a:solidFill>
@@ -4258,7 +4251,7 @@
               </a:defRPr>
             </a:pPr>
             <a:r>
-              <a:t>AI 視覺檢測系統超越人類，分析超高分辨率 SEM 圖像，檢測微觀缺陷。NVIDIA 應用生成式 AI、VFMs 現代化 ADC，大幅減少標註數據需求，NVIDIA Cosmos Reason VLM 在晶圓缺陷分類達 96% 準確度。</a:t>
+              <a:t>在先進製程中，AI Agent透過深度學習和電腦視覺技術，即時處理大量圖像數據，以比人工檢查更高的精度識別微觀缺陷。系統能自動分析高解析度顯微鏡數據，實現快速、一致且可擴展的缺陷檢測，並識別出傳統方法可能遺漏的模式和異常，將缺陷檢測速度提升30-40%，誤報率降低10-15%。</a:t>
             </a:r>
           </a:p>
         </p:txBody>
@@ -4271,8 +4264,8 @@
         </p:nvSpPr>
         <p:spPr>
           <a:xfrm>
-            <a:off x="4495190" y="1645920"/>
-            <a:ext cx="3200400" cy="4389120"/>
+            <a:off x="914400" y="3977640"/>
+            <a:ext cx="4846320" cy="2057400"/>
           </a:xfrm>
           <a:prstGeom prst="rect">
             <a:avLst/>
@@ -4316,8 +4309,8 @@
         </p:nvSpPr>
         <p:spPr>
           <a:xfrm>
-            <a:off x="4815230" y="1965960"/>
-            <a:ext cx="2560320" cy="3749040"/>
+            <a:off x="1143000" y="4206240"/>
+            <a:ext cx="4389120" cy="1600200"/>
           </a:xfrm>
           <a:prstGeom prst="rect">
             <a:avLst/>
@@ -4332,9 +4325,9 @@
           <a:p>
             <a:pPr>
               <a:spcAft>
-                <a:spcPts val="1400"/>
+                <a:spcPts val="800"/>
               </a:spcAft>
-              <a:defRPr sz="1600" b="1">
+              <a:defRPr sz="1500" b="1">
                 <a:solidFill>
                   <a:srgbClr val="FDE047"/>
                 </a:solidFill>
@@ -4342,15 +4335,15 @@
               </a:defRPr>
             </a:pPr>
             <a:r>
-              <a:t>📍 智能根因分析 (RCA) 與設計整合</a:t>
+              <a:t>📍 自動化根因分析與因果AI</a:t>
             </a:r>
           </a:p>
           <a:p>
             <a:pPr>
               <a:lnSpc>
-                <a:spcPct val="135000"/>
+                <a:spcPct val="130000"/>
               </a:lnSpc>
-              <a:defRPr sz="1200">
+              <a:defRPr sz="1100">
                 <a:solidFill>
                   <a:srgbClr val="CBD5E1"/>
                 </a:solidFill>
@@ -4358,7 +4351,7 @@
               </a:defRPr>
             </a:pPr>
             <a:r>
-              <a:t>AI 將良率分析從手動轉為主動，大規模分析檢測圖像，將缺陷與工具歷史、製程步驟關聯。可將良率損失根因週期縮短 75-90%。AI 整合設計信息，優化檢測配方，提高系統性缺陷檢測能力。</a:t>
+              <a:t>AI Agent能整合缺陷日誌、生產參數、設備性能等多源數據，實現自動化根因分析(RCA)。當良率預測模型識別出預期良率偏低時，AI Agent系統會自動回溯FDC數據，鎖定最可能的異常站點與參數，將傳統數天的根因調查壓縮至數小時。因果AI更超越預測性警報，實現快速根因識別與規範性行動，RCA時間縮短50%以上。</a:t>
             </a:r>
           </a:p>
         </p:txBody>
@@ -4371,8 +4364,8 @@
         </p:nvSpPr>
         <p:spPr>
           <a:xfrm>
-            <a:off x="8075980" y="1645920"/>
-            <a:ext cx="3200400" cy="4389120"/>
+            <a:off x="6217920" y="1645920"/>
+            <a:ext cx="5029200" cy="4389120"/>
           </a:xfrm>
           <a:prstGeom prst="rect">
             <a:avLst/>
@@ -4408,61 +4401,30 @@
           </a:p>
         </p:txBody>
       </p:sp>
-      <p:sp>
-        <p:nvSpPr>
-          <p:cNvPr id="9" name="TextBox 8"/>
-          <p:cNvSpPr txBox="1"/>
+      <p:pic>
+        <p:nvPicPr>
+          <p:cNvPr id="9" name="Picture 8" descr="wafer_defect.png"/>
+          <p:cNvPicPr>
+            <a:picLocks noChangeAspect="1"/>
+          </p:cNvPicPr>
           <p:nvPr/>
-        </p:nvSpPr>
-        <p:spPr>
-          <a:xfrm>
-            <a:off x="8396020" y="1965960"/>
-            <a:ext cx="2560320" cy="3749040"/>
+        </p:nvPicPr>
+        <p:blipFill>
+          <a:blip r:embed="rId2"/>
+          <a:stretch>
+            <a:fillRect/>
+          </a:stretch>
+        </p:blipFill>
+        <p:spPr>
+          <a:xfrm>
+            <a:off x="6355080" y="1783080"/>
+            <a:ext cx="4754880" cy="4114800"/>
           </a:xfrm>
           <a:prstGeom prst="rect">
             <a:avLst/>
           </a:prstGeom>
-          <a:noFill/>
-        </p:spPr>
-        <p:txBody>
-          <a:bodyPr wrap="square" lIns="0" rIns="0" tIns="0" bIns="0">
-            <a:spAutoFit/>
-          </a:bodyPr>
-          <a:lstStyle/>
-          <a:p>
-            <a:pPr>
-              <a:spcAft>
-                <a:spcPts val="1400"/>
-              </a:spcAft>
-              <a:defRPr sz="1600" b="1">
-                <a:solidFill>
-                  <a:srgbClr val="FDE047"/>
-                </a:solidFill>
-                <a:latin typeface="Microsoft JhengHei"/>
-              </a:defRPr>
-            </a:pPr>
-            <a:r>
-              <a:t>📍 深度學習應用與產業實踐</a:t>
-            </a:r>
-          </a:p>
-          <a:p>
-            <a:pPr>
-              <a:lnSpc>
-                <a:spcPct val="135000"/>
-              </a:lnSpc>
-              <a:defRPr sz="1200">
-                <a:solidFill>
-                  <a:srgbClr val="CBD5E1"/>
-                </a:solidFill>
-                <a:latin typeface="Microsoft JhengHei"/>
-              </a:defRPr>
-            </a:pPr>
-            <a:r>
-              <a:t>深度學習網絡如 ViT、1D CNN 在 SEM 圖像缺陷分類中表現卓越，即使少量數據也能達 90% 以上準確度。Intel 利用 AI 工作流程自動識別 GFA，TSMC 深度學習系統將缺陷率降低 40%，良率提升 20%。</a:t>
-            </a:r>
-          </a:p>
-        </p:txBody>
-      </p:sp>
+        </p:spPr>
+      </p:pic>
     </p:spTree>
   </p:cSld>
   <p:clrMapOvr>
@@ -4560,7 +4522,7 @@
               </a:defRPr>
             </a:pPr>
             <a:r>
-              <a:t>領域專用智慧：SemiKong 與 Agent Yield Stack 構建良率治理新框架</a:t>
+              <a:t>領域專用模型：SemiKong與Agent Yield Stack</a:t>
             </a:r>
           </a:p>
           <a:p>
@@ -4573,7 +4535,7 @@
               </a:defRPr>
             </a:pPr>
             <a:r>
-              <a:t>知識傳承與協同智能，加速半導體創新週期</a:t>
+              <a:t>專家知識轉化為自主AI行動，優化良率治理</a:t>
             </a:r>
           </a:p>
         </p:txBody>
@@ -4587,7 +4549,7 @@
         <p:spPr>
           <a:xfrm>
             <a:off x="914400" y="1645920"/>
-            <a:ext cx="3200400" cy="4389120"/>
+            <a:ext cx="4937760" cy="4389120"/>
           </a:xfrm>
           <a:prstGeom prst="rect">
             <a:avLst/>
@@ -4632,7 +4594,7 @@
         <p:spPr>
           <a:xfrm>
             <a:off x="1234440" y="1965960"/>
-            <a:ext cx="2560320" cy="3749040"/>
+            <a:ext cx="4297680" cy="3749040"/>
           </a:xfrm>
           <a:prstGeom prst="rect">
             <a:avLst/>
@@ -4657,7 +4619,7 @@
               </a:defRPr>
             </a:pPr>
             <a:r>
-              <a:t>📍 AI Agent 興起與知識傳承</a:t>
+              <a:t>📍 SemiKong：半導體專用LLM</a:t>
             </a:r>
           </a:p>
           <a:p>
@@ -4673,7 +4635,7 @@
               </a:defRPr>
             </a:pPr>
             <a:r>
-              <a:t>隨著資深專家退休，AI Agent 提供保存和擴展專業知識的機會。Aitomatic 的 Domain-Expert Agents (DXAs) 基於 DANA 神經符號架構，通過「捕捉-訓練-應用」生命週期，系統性解決專業知識瓶頸。</a:t>
+              <a:t>Aitomatic於2024年7月發佈SemiKong，全球首個專為半導體產業設計的開源AI大型語言模型(LLM)。SemiKong在行業特定任務上超越GPT和Llama3等通用LLM，在準確性、相關性和對半導體製程的理解方面表現出顯著改進。它旨在徹底改變半導體製程和製造技術，將專家知識轉化為24/7運行的自主AI Agent。</a:t>
             </a:r>
           </a:p>
         </p:txBody>
@@ -4686,8 +4648,8 @@
         </p:nvSpPr>
         <p:spPr>
           <a:xfrm>
-            <a:off x="4495190" y="1645920"/>
-            <a:ext cx="3200400" cy="4389120"/>
+            <a:off x="6339535" y="1645920"/>
+            <a:ext cx="4937760" cy="4389120"/>
           </a:xfrm>
           <a:prstGeom prst="rect">
             <a:avLst/>
@@ -4731,8 +4693,8 @@
         </p:nvSpPr>
         <p:spPr>
           <a:xfrm>
-            <a:off x="4815230" y="1965960"/>
-            <a:ext cx="2560320" cy="3749040"/>
+            <a:off x="6659575" y="1965960"/>
+            <a:ext cx="4297680" cy="3749040"/>
           </a:xfrm>
           <a:prstGeom prst="rect">
             <a:avLst/>
@@ -4757,7 +4719,7 @@
               </a:defRPr>
             </a:pPr>
             <a:r>
-              <a:t>📍 SemiKong：半導體專用 LLM</a:t>
+              <a:t>📍 Agent Yield Stack：多智能體協同治理</a:t>
             </a:r>
           </a:p>
           <a:p>
@@ -4773,107 +4735,7 @@
               </a:defRPr>
             </a:pPr>
             <a:r>
-              <a:t>Aitomatic、TEL、FPT 合作開發的 SemiKong 是全球首個半導體開源 LLM，基於 Llama 3.1 70B，微調數億 tokens 專業數據。預計縮短新晶片設計上市時間 20-30%，提高首次成功率 15-25%。</a:t>
-            </a:r>
-          </a:p>
-        </p:txBody>
-      </p:sp>
-      <p:sp>
-        <p:nvSpPr>
-          <p:cNvPr id="8" name="Rectangle 7"/>
-          <p:cNvSpPr/>
-          <p:nvPr/>
-        </p:nvSpPr>
-        <p:spPr>
-          <a:xfrm>
-            <a:off x="8075980" y="1645920"/>
-            <a:ext cx="3200400" cy="4389120"/>
-          </a:xfrm>
-          <a:prstGeom prst="rect">
-            <a:avLst/>
-          </a:prstGeom>
-          <a:solidFill>
-            <a:srgbClr val="1E293B"/>
-          </a:solidFill>
-          <a:ln w="19050">
-            <a:solidFill>
-              <a:srgbClr val="334155"/>
-            </a:solidFill>
-          </a:ln>
-        </p:spPr>
-        <p:style>
-          <a:lnRef idx="1">
-            <a:schemeClr val="accent1"/>
-          </a:lnRef>
-          <a:fillRef idx="3">
-            <a:schemeClr val="accent1"/>
-          </a:fillRef>
-          <a:effectRef idx="2">
-            <a:schemeClr val="accent1"/>
-          </a:effectRef>
-          <a:fontRef idx="minor">
-            <a:schemeClr val="lt1"/>
-          </a:fontRef>
-        </p:style>
-        <p:txBody>
-          <a:bodyPr rtlCol="0" anchor="ctr"/>
-          <a:lstStyle/>
-          <a:p>
-            <a:pPr algn="ctr"/>
-          </a:p>
-        </p:txBody>
-      </p:sp>
-      <p:sp>
-        <p:nvSpPr>
-          <p:cNvPr id="9" name="TextBox 8"/>
-          <p:cNvSpPr txBox="1"/>
-          <p:nvPr/>
-        </p:nvSpPr>
-        <p:spPr>
-          <a:xfrm>
-            <a:off x="8396020" y="1965960"/>
-            <a:ext cx="2560320" cy="3749040"/>
-          </a:xfrm>
-          <a:prstGeom prst="rect">
-            <a:avLst/>
-          </a:prstGeom>
-          <a:noFill/>
-        </p:spPr>
-        <p:txBody>
-          <a:bodyPr wrap="square" lIns="0" rIns="0" tIns="0" bIns="0">
-            <a:spAutoFit/>
-          </a:bodyPr>
-          <a:lstStyle/>
-          <a:p>
-            <a:pPr>
-              <a:spcAft>
-                <a:spcPts val="1400"/>
-              </a:spcAft>
-              <a:defRPr sz="1600" b="1">
-                <a:solidFill>
-                  <a:srgbClr val="FDE047"/>
-                </a:solidFill>
-                <a:latin typeface="Microsoft JhengHei"/>
-              </a:defRPr>
-            </a:pPr>
-            <a:r>
-              <a:t>📍 Agent Yield Stack 概念與 DXA Factory</a:t>
-            </a:r>
-          </a:p>
-          <a:p>
-            <a:pPr>
-              <a:lnSpc>
-                <a:spcPct val="135000"/>
-              </a:lnSpc>
-              <a:defRPr sz="1200">
-                <a:solidFill>
-                  <a:srgbClr val="CBD5E1"/>
-                </a:solidFill>
-                <a:latin typeface="Microsoft JhengHei"/>
-              </a:defRPr>
-            </a:pPr>
-            <a:r>
-              <a:t>Agent Yield Stack 體現多領域專家 Agent 協同工作，實現良率全面智能治理。Aitomatic DXA Factory 平台旨在創建數十億個 Agent，捕捉企業認知本體，自動構建知識圖譜，實現良率持續優化。</a:t>
+              <a:t>Agent Yield Stack概念強調部署多個自主AI Agent，它們能感知環境、推理複雜目標並採取果斷行動。感知智能體可降低50%以上無效警報；診斷智能體在數分鐘內輸出根因定位及置信度評估；決策智能體量化對比應對方案成本與風險；執行智能體自動下發工藝校準指令。這實現了從簡單問題檢測到自主診斷與解決的轉變。</a:t>
             </a:r>
           </a:p>
         </p:txBody>
@@ -4975,7 +4837,7 @@
               </a:defRPr>
             </a:pPr>
             <a:r>
-              <a:t>異質整合挑戰：AI Agent 協同優化先進封裝與 HBM 良率</a:t>
+              <a:t>先進封裝與HBM：AI協同良率控制</a:t>
             </a:r>
           </a:p>
           <a:p>
@@ -4988,7 +4850,7 @@
               </a:defRPr>
             </a:pPr>
             <a:r>
-              <a:t>跨製程數據融合，打造高密度晶片生產新引擎</a:t>
+              <a:t>應對複雜挑戰，提升性能與能源效率</a:t>
             </a:r>
           </a:p>
         </p:txBody>
@@ -5002,7 +4864,7 @@
         <p:spPr>
           <a:xfrm>
             <a:off x="914400" y="1645920"/>
-            <a:ext cx="3200400" cy="4389120"/>
+            <a:ext cx="4846320" cy="2057400"/>
           </a:xfrm>
           <a:prstGeom prst="rect">
             <a:avLst/>
@@ -5046,8 +4908,8 @@
         </p:nvSpPr>
         <p:spPr>
           <a:xfrm>
-            <a:off x="1234440" y="1965960"/>
-            <a:ext cx="2560320" cy="3749040"/>
+            <a:off x="1143000" y="1874520"/>
+            <a:ext cx="4389120" cy="1600200"/>
           </a:xfrm>
           <a:prstGeom prst="rect">
             <a:avLst/>
@@ -5062,9 +4924,9 @@
           <a:p>
             <a:pPr>
               <a:spcAft>
-                <a:spcPts val="1400"/>
+                <a:spcPts val="800"/>
               </a:spcAft>
-              <a:defRPr sz="1600" b="1">
+              <a:defRPr sz="1500" b="1">
                 <a:solidFill>
                   <a:srgbClr val="FDE047"/>
                 </a:solidFill>
@@ -5072,15 +4934,15 @@
               </a:defRPr>
             </a:pPr>
             <a:r>
-              <a:t>📍 先進封裝與 HBM 的良率挑戰</a:t>
+              <a:t>📍 AI優化先進封裝良率</a:t>
             </a:r>
           </a:p>
           <a:p>
             <a:pPr>
               <a:lnSpc>
-                <a:spcPct val="135000"/>
+                <a:spcPct val="130000"/>
               </a:lnSpc>
-              <a:defRPr sz="1200">
+              <a:defRPr sz="1100">
                 <a:solidFill>
                   <a:srgbClr val="CBD5E1"/>
                 </a:solidFill>
@@ -5088,7 +4950,7 @@
               </a:defRPr>
             </a:pPr>
             <a:r>
-              <a:t>CoWoS、異質整合、HBM 等技術複雜性高，涉及多晶片、異質材料與複雜互連，微小缺陷即導致模組失效。傳統單一製程控制不足，AI 需整合設計、製造、測試數據，應對前所未有挑戰。</a:t>
+              <a:t>先進封裝如CoWoS和異質整合，涉及多晶片互連與堆疊，引入新的良率挑戰。AI Agent能管理複雜任務，優化晶片佈局、運行驗證週期，並平衡性能與功耗。在每個環節，AI進行更精準的缺陷檢測與良率預測，透過圖像識別和數據分析快速識別多晶片互連缺陷，將封裝良率提升3-5%，並將製程參數優化時間縮短20%。</a:t>
             </a:r>
           </a:p>
         </p:txBody>
@@ -5101,8 +4963,8 @@
         </p:nvSpPr>
         <p:spPr>
           <a:xfrm>
-            <a:off x="4495190" y="1645920"/>
-            <a:ext cx="3200400" cy="4389120"/>
+            <a:off x="914400" y="3977640"/>
+            <a:ext cx="4846320" cy="2057400"/>
           </a:xfrm>
           <a:prstGeom prst="rect">
             <a:avLst/>
@@ -5146,8 +5008,8 @@
         </p:nvSpPr>
         <p:spPr>
           <a:xfrm>
-            <a:off x="4815230" y="1965960"/>
-            <a:ext cx="2560320" cy="3749040"/>
+            <a:off x="1143000" y="4206240"/>
+            <a:ext cx="4389120" cy="1600200"/>
           </a:xfrm>
           <a:prstGeom prst="rect">
             <a:avLst/>
@@ -5162,9 +5024,9 @@
           <a:p>
             <a:pPr>
               <a:spcAft>
-                <a:spcPts val="1400"/>
+                <a:spcPts val="800"/>
               </a:spcAft>
-              <a:defRPr sz="1600" b="1">
+              <a:defRPr sz="1500" b="1">
                 <a:solidFill>
                   <a:srgbClr val="FDE047"/>
                 </a:solidFill>
@@ -5172,15 +5034,15 @@
               </a:defRPr>
             </a:pPr>
             <a:r>
-              <a:t>📍 AI 驅動的設計、製造與測試整合</a:t>
+              <a:t>📍 HBM良率控制與能源效率</a:t>
             </a:r>
           </a:p>
           <a:p>
             <a:pPr>
               <a:lnSpc>
-                <a:spcPct val="135000"/>
+                <a:spcPct val="130000"/>
               </a:lnSpc>
-              <a:defRPr sz="1200">
+              <a:defRPr sz="1100">
                 <a:solidFill>
                   <a:srgbClr val="CBD5E1"/>
                 </a:solidFill>
@@ -5188,7 +5050,7 @@
               </a:defRPr>
             </a:pPr>
             <a:r>
-              <a:t>AI 在晶片設計階段自動化佈局，縮短週期。製造中，AI 視覺檢測、實時製程控制、預測性維護直接提升基礎晶片與組裝良率。測試環節，AI 優化測試路徑，DDYA 將根因週期縮短 75-90%。</a:t>
+              <a:t>HBM製造涉及複雜堆疊和微凸塊連接，對良率要求極高。Samsung已出貨12層HBM4E樣品，AI在設計和製程優化中發揮關鍵作用，透過分析生產數據調整製程參數，提高性能、功耗效率和良率。TSMC強調能源效率是AI晶片開發核心，預計N2至A14世代功耗可降低30%，AI在優化先進封裝設計中至關重要。</a:t>
             </a:r>
           </a:p>
         </p:txBody>
@@ -5201,8 +5063,8 @@
         </p:nvSpPr>
         <p:spPr>
           <a:xfrm>
-            <a:off x="8075980" y="1645920"/>
-            <a:ext cx="3200400" cy="4389120"/>
+            <a:off x="6217920" y="1645920"/>
+            <a:ext cx="5029200" cy="4389120"/>
           </a:xfrm>
           <a:prstGeom prst="rect">
             <a:avLst/>
@@ -5238,61 +5100,30 @@
           </a:p>
         </p:txBody>
       </p:sp>
-      <p:sp>
-        <p:nvSpPr>
-          <p:cNvPr id="9" name="TextBox 8"/>
-          <p:cNvSpPr txBox="1"/>
+      <p:pic>
+        <p:nvPicPr>
+          <p:cNvPr id="9" name="Picture 8" descr="yield_stack.png"/>
+          <p:cNvPicPr>
+            <a:picLocks noChangeAspect="1"/>
+          </p:cNvPicPr>
           <p:nvPr/>
-        </p:nvSpPr>
-        <p:spPr>
-          <a:xfrm>
-            <a:off x="8396020" y="1965960"/>
-            <a:ext cx="2560320" cy="3749040"/>
+        </p:nvPicPr>
+        <p:blipFill>
+          <a:blip r:embed="rId2"/>
+          <a:stretch>
+            <a:fillRect/>
+          </a:stretch>
+        </p:blipFill>
+        <p:spPr>
+          <a:xfrm>
+            <a:off x="6355080" y="1783080"/>
+            <a:ext cx="4754880" cy="4114800"/>
           </a:xfrm>
           <a:prstGeom prst="rect">
             <a:avLst/>
           </a:prstGeom>
-          <a:noFill/>
-        </p:spPr>
-        <p:txBody>
-          <a:bodyPr wrap="square" lIns="0" rIns="0" tIns="0" bIns="0">
-            <a:spAutoFit/>
-          </a:bodyPr>
-          <a:lstStyle/>
-          <a:p>
-            <a:pPr>
-              <a:spcAft>
-                <a:spcPts val="1400"/>
-              </a:spcAft>
-              <a:defRPr sz="1600" b="1">
-                <a:solidFill>
-                  <a:srgbClr val="FDE047"/>
-                </a:solidFill>
-                <a:latin typeface="Microsoft JhengHei"/>
-              </a:defRPr>
-            </a:pPr>
-            <a:r>
-              <a:t>📍 Agentic AI 的協同作用與產業實踐</a:t>
-            </a:r>
-          </a:p>
-          <a:p>
-            <a:pPr>
-              <a:lnSpc>
-                <a:spcPct val="135000"/>
-              </a:lnSpc>
-              <a:defRPr sz="1200">
-                <a:solidFill>
-                  <a:srgbClr val="CBD5E1"/>
-                </a:solidFill>
-                <a:latin typeface="Microsoft JhengHei"/>
-              </a:defRPr>
-            </a:pPr>
-            <a:r>
-              <a:t>在複雜先進封裝生態中，不同 AI Agent 協同工作，監控晶圓製造、封裝缺陷、HBM 質量。Agent 間共享信息、學習，共同優化整體良率，形成「Agent Yield Stack」。TSMC、Intel、Samsung 均將 AI 應用於先進製程與封裝。</a:t>
-            </a:r>
-          </a:p>
-        </p:txBody>
-      </p:sp>
+        </p:spPr>
+      </p:pic>
     </p:spTree>
   </p:cSld>
   <p:clrMapOvr>
@@ -5390,7 +5221,7 @@
               </a:defRPr>
             </a:pPr>
             <a:r>
-              <a:t>AI Agent 引領半導體製造新紀元</a:t>
+              <a:t>產業巨頭動態與未來展望</a:t>
             </a:r>
           </a:p>
           <a:p>
@@ -5403,7 +5234,7 @@
               </a:defRPr>
             </a:pPr>
             <a:r>
-              <a:t>邁向智能、自優化與自修復的晶圓廠未來</a:t>
+              <a:t>AI Agent引領智慧製造新浪潮</a:t>
             </a:r>
           </a:p>
         </p:txBody>
@@ -5417,7 +5248,7 @@
         <p:spPr>
           <a:xfrm>
             <a:off x="914400" y="1645920"/>
-            <a:ext cx="3200400" cy="4389120"/>
+            <a:ext cx="4937760" cy="4389120"/>
           </a:xfrm>
           <a:prstGeom prst="rect">
             <a:avLst/>
@@ -5462,7 +5293,7 @@
         <p:spPr>
           <a:xfrm>
             <a:off x="1234440" y="1965960"/>
-            <a:ext cx="2560320" cy="3749040"/>
+            <a:ext cx="4297680" cy="3749040"/>
           </a:xfrm>
           <a:prstGeom prst="rect">
             <a:avLst/>
@@ -5487,7 +5318,7 @@
               </a:defRPr>
             </a:pPr>
             <a:r>
-              <a:t>📍 AI Agent 驅動的產業變革</a:t>
+              <a:t>📍 領先企業的AI部署</a:t>
             </a:r>
           </a:p>
           <a:p>
@@ -5503,7 +5334,7 @@
               </a:defRPr>
             </a:pPr>
             <a:r>
-              <a:t>AI Agent 正將半導體製造從反應式、手動干預轉變為預測性、自主化和智能化的生態系統。從自主製程控制到智能缺陷診斷，再到領域專用模型，AI 正在全面提升良率，加速產品上市。</a:t>
+              <a:t>TSMC積極利用AI Agent實現自主製程控制，特別在光刻等關鍵製程中防止良率損失。Samsung和Intel在2025年已實現5-8%的AI Agent自主化，並在缺陷分析、製程優化及先進封裝技術如Foveros中廣泛應用AI。Aitomatic的SemiKong與TEL的合作，則推動領域專用AI Agent解決複雜製造問題，提升效率。</a:t>
             </a:r>
           </a:p>
         </p:txBody>
@@ -5516,8 +5347,8 @@
         </p:nvSpPr>
         <p:spPr>
           <a:xfrm>
-            <a:off x="4495190" y="1645920"/>
-            <a:ext cx="3200400" cy="4389120"/>
+            <a:off x="6339535" y="1645920"/>
+            <a:ext cx="4937760" cy="4389120"/>
           </a:xfrm>
           <a:prstGeom prst="rect">
             <a:avLst/>
@@ -5561,8 +5392,8 @@
         </p:nvSpPr>
         <p:spPr>
           <a:xfrm>
-            <a:off x="4815230" y="1965960"/>
-            <a:ext cx="2560320" cy="3749040"/>
+            <a:off x="6659575" y="1965960"/>
+            <a:ext cx="4297680" cy="3749040"/>
           </a:xfrm>
           <a:prstGeom prst="rect">
             <a:avLst/>
@@ -5587,7 +5418,7 @@
               </a:defRPr>
             </a:pPr>
             <a:r>
-              <a:t>📍 應對未來挑戰的關鍵能力</a:t>
+              <a:t>📍 智慧製造的未來願景</a:t>
             </a:r>
           </a:p>
           <a:p>
@@ -5603,107 +5434,7 @@
               </a:defRPr>
             </a:pPr>
             <a:r>
-              <a:t>面對先進封裝、HBM 等複雜技術，AI Agent 的協同良率控制能力不可或缺。通過整合跨製程、跨設備數據，利用領域專用知識和多 Agent 協作，製造商能更快速、精確地解決良率問題。</a:t>
-            </a:r>
-          </a:p>
-        </p:txBody>
-      </p:sp>
-      <p:sp>
-        <p:nvSpPr>
-          <p:cNvPr id="8" name="Rectangle 7"/>
-          <p:cNvSpPr/>
-          <p:nvPr/>
-        </p:nvSpPr>
-        <p:spPr>
-          <a:xfrm>
-            <a:off x="8075980" y="1645920"/>
-            <a:ext cx="3200400" cy="4389120"/>
-          </a:xfrm>
-          <a:prstGeom prst="rect">
-            <a:avLst/>
-          </a:prstGeom>
-          <a:solidFill>
-            <a:srgbClr val="1E293B"/>
-          </a:solidFill>
-          <a:ln w="19050">
-            <a:solidFill>
-              <a:srgbClr val="334155"/>
-            </a:solidFill>
-          </a:ln>
-        </p:spPr>
-        <p:style>
-          <a:lnRef idx="1">
-            <a:schemeClr val="accent1"/>
-          </a:lnRef>
-          <a:fillRef idx="3">
-            <a:schemeClr val="accent1"/>
-          </a:fillRef>
-          <a:effectRef idx="2">
-            <a:schemeClr val="accent1"/>
-          </a:effectRef>
-          <a:fontRef idx="minor">
-            <a:schemeClr val="lt1"/>
-          </a:fontRef>
-        </p:style>
-        <p:txBody>
-          <a:bodyPr rtlCol="0" anchor="ctr"/>
-          <a:lstStyle/>
-          <a:p>
-            <a:pPr algn="ctr"/>
-          </a:p>
-        </p:txBody>
-      </p:sp>
-      <p:sp>
-        <p:nvSpPr>
-          <p:cNvPr id="9" name="TextBox 8"/>
-          <p:cNvSpPr txBox="1"/>
-          <p:nvPr/>
-        </p:nvSpPr>
-        <p:spPr>
-          <a:xfrm>
-            <a:off x="8396020" y="1965960"/>
-            <a:ext cx="2560320" cy="3749040"/>
-          </a:xfrm>
-          <a:prstGeom prst="rect">
-            <a:avLst/>
-          </a:prstGeom>
-          <a:noFill/>
-        </p:spPr>
-        <p:txBody>
-          <a:bodyPr wrap="square" lIns="0" rIns="0" tIns="0" bIns="0">
-            <a:spAutoFit/>
-          </a:bodyPr>
-          <a:lstStyle/>
-          <a:p>
-            <a:pPr>
-              <a:spcAft>
-                <a:spcPts val="1400"/>
-              </a:spcAft>
-              <a:defRPr sz="1600" b="1">
-                <a:solidFill>
-                  <a:srgbClr val="FDE047"/>
-                </a:solidFill>
-                <a:latin typeface="Microsoft JhengHei"/>
-              </a:defRPr>
-            </a:pPr>
-            <a:r>
-              <a:t>📍 展望智能晶圓廠的未來</a:t>
-            </a:r>
-          </a:p>
-          <a:p>
-            <a:pPr>
-              <a:lnSpc>
-                <a:spcPct val="135000"/>
-              </a:lnSpc>
-              <a:defRPr sz="1200">
-                <a:solidFill>
-                  <a:srgbClr val="CBD5E1"/>
-                </a:solidFill>
-                <a:latin typeface="Microsoft JhengHei"/>
-              </a:defRPr>
-            </a:pPr>
-            <a:r>
-              <a:t>隨著 AI Agent 系統的成熟與普及，我們將見證更加智能、自優化和自修復的晶圓廠。這將為下一代高性能晶片的生產奠定堅實基礎，持續推動半導體製造業的創新與效率提升。</a:t>
+              <a:t>AI Agent與半導體製程的結合，正引領一場深刻的變革。從智能分析轉向自主行動，AI Agent已成為半導體製造業不可或缺的一部分。未來的半導體工廠將是一個由多個智能體協同運作的「數位神經系統」，實現更高的效率、更低的成本和更快的創新速度，為AI時代的發展提供堅實基礎，預計整體良率可提升5-10%。</a:t>
             </a:r>
           </a:p>
         </p:txBody>
